--- a/Italy IBR/Class 2/Class 2 - Revised.pptx
+++ b/Italy IBR/Class 2/Class 2 - Revised.pptx
@@ -517,7 +517,7 @@
           <a:lstStyle/>
           <a:p>
             <a:r>
-              <a:t>Welcome back. This is our second class, and today the class is yours: seven groups present, and we debate. Two broad-topic debates and five of the companies we will visit in Milan and Turin. I will keep time and moderate, and we close by looking ahead to the trip itself.</a:t>
+              <a:t>Welcome back. This is our second class, and today the class is yours: 9 groups present, and we debate. Two broad-topic debates and five of the companies we will visit in Milan and Turin. I will keep time and moderate, and we close by looking ahead to the trip itself.</a:t>
             </a:r>
           </a:p>
         </p:txBody>
@@ -867,7 +867,7 @@
           <a:lstStyle/>
           <a:p>
             <a:r>
-              <a:t>This is the full week. Milan Sunday through Wednesday, then we coach over to Turin on Thursday morning. The company sessions are the ones five of the groups are presenting on today: Pirelli and EssilorLuxottica and Prada on Tuesday, Kering and Inter on Wednesday, then Lavazza and Carioca in Turin, and Stellantis and LeapFactory on Friday. Bocconi opens the week on Monday morning, and the Wednesday late-morning slot is still being settled between Dolce&amp;Gabbana and Eataly.</a:t>
+              <a:t>This is the full week, Sunday the 6th through Friday the 11th. Milan Sunday through Wednesday, then we coach over to Turin on Thursday morning. The company sessions are the ones 5 of the groups are presenting on today: Pirelli and EssilorLuxottica and Prada on Tuesday, Kering and Inter on Wednesday, then Lavazza and Carioca in Turin, and Stellantis and LeapFactory on Friday. Bocconi opens the week on Monday morning, and the Wednesday late-morning slot is Eataly.</a:t>
             </a:r>
           </a:p>
         </p:txBody>
@@ -1066,7 +1066,7 @@
           <a:lstStyle/>
           <a:p>
             <a:r>
-              <a:t>Here is the plan. First the logistics from here to Milan, then a quick poll on when you arrive, and then the main event: the seven group presentations. Two of them are head-to-head debates on broad questions about the Italian economy, and five are company presentations on firms we will actually walk into during the trip.</a:t>
+              <a:t>Here is the plan. First the logistics from here to Milan, then a quick poll on when you arrive, and then the main event: the 9 group presentations. Two of them are head-to-head debates on broad questions about the Italian economy, and five are company presentations on firms we will actually walk into during the trip.</a:t>
             </a:r>
           </a:p>
         </p:txBody>
@@ -1136,7 +1136,7 @@
           <a:lstStyle/>
           <a:p>
             <a:r>
-              <a:t>Three things on timing. Today each group gives a 2 to 3 minute executive summary of the video you already submitted, and then we open it up; I will cap each topic at 20 minutes so everyone gets the floor. The trip runs September 6 to 12, Milan first and then Turin, and the full day-by-day schedule is on the last slide if you click through. Dress code is casual throughout, and do get melatonin before you fly. We meet once more on October 4 to debrief and talk through your reports.</a:t>
+              <a:t>Three things on timing. Today each group gives a 2 to 3 minute executive summary of the video you already submitted, and then we open it up; I will cap each topic at 20 minutes so everyone gets the floor. The trip runs September 6 to 11, Milan first and then Turin, with flights home on Saturday the 12th. The full day-by-day schedule is on the last slide if you click through. Dress code is casual throughout, and do get melatonin before you fly. We meet once more on October 4 to debrief and talk through your reports.</a:t>
             </a:r>
           </a:p>
         </p:txBody>
@@ -1206,7 +1206,7 @@
           <a:lstStyle/>
           <a:p>
             <a:r>
-              <a:t>Now over to you. Seven presentations, in the order on the next slide.</a:t>
+              <a:t>Now over to you. 9 groups present, in the order on the next slide.</a:t>
             </a:r>
           </a:p>
         </p:txBody>
@@ -1276,7 +1276,7 @@
           <a:lstStyle/>
           <a:p>
             <a:r>
-              <a:t>This is the running order, and it follows the sign-up sheet. We start with the two debates, where two groups argue opposite sides of the same question, and then move to the five company presentations. Each company group introduces the firm and then makes the case for or against investing in it.</a:t>
+              <a:t>This is the running order, and it follows the group numbers from the sign-up sheet. 9 groups present across 7 slots: 2 of the slots are head-to-head debates, where two groups argue opposite sides of the same question, and 5 are company presentations. Each company group introduces the firm and then makes the case for or against investing in it.</a:t>
             </a:r>
           </a:p>
         </p:txBody>
@@ -7939,7 +7939,7 @@
                 </a:solidFill>
                 <a:latin typeface="Calibri"/>
               </a:rPr>
-              <a:t>Trip Schedule (Sep 6 – 12)</a:t>
+              <a:t>Trip Schedule (Sep 6 – 11)</a:t>
             </a:r>
           </a:p>
         </p:txBody>
@@ -8216,8 +8216,8 @@
         </p:blipFill>
         <p:spPr>
           <a:xfrm>
-            <a:off x="2194635" y="1243584"/>
-            <a:ext cx="7802730" cy="4956048"/>
+            <a:off x="2833402" y="1243584"/>
+            <a:ext cx="6525196" cy="4974336"/>
           </a:xfrm>
           <a:prstGeom prst="rect">
             <a:avLst/>
@@ -8281,8 +8281,8 @@
         </p:nvSpPr>
         <p:spPr>
           <a:xfrm>
-            <a:off x="2194635" y="6254496"/>
-            <a:ext cx="7802730" cy="237744"/>
+            <a:off x="2833402" y="6254496"/>
+            <a:ext cx="6525196" cy="237744"/>
           </a:xfrm>
           <a:prstGeom prst="rect">
             <a:avLst/>
@@ -9173,7 +9173,7 @@
                 </a:solidFill>
                 <a:latin typeface="Calibri"/>
               </a:rPr>
-              <a:t>Seven group presentations – in order of group number</a:t>
+              <a:t>9 group presentations – in order of group number</a:t>
             </a:r>
           </a:p>
         </p:txBody>
@@ -9685,7 +9685,7 @@
                 </a:solidFill>
                 <a:latin typeface="Calibri"/>
               </a:rPr>
-              <a:t>Trip to Italy: Sep 6 – 12 – Milan &amp; Turin   (</a:t>
+              <a:t>Trip to Italy: Sep 6 – 11 – Milan &amp; Turin   (</a:t>
             </a:r>
             <a:r>
               <a:rPr lang="en-US" sz="2800" b="0" i="0" u="sng">
@@ -10481,7 +10481,7 @@
                 </a:solidFill>
                 <a:latin typeface="Calibri"/>
               </a:rPr>
-              <a:t>Today’s Line-Up – Seven Presentations</a:t>
+              <a:t>Today’s Line-Up – 9 Presentations</a:t>
             </a:r>
           </a:p>
         </p:txBody>

--- a/Italy IBR/Class 2/Class 2 - Revised.pptx
+++ b/Italy IBR/Class 2/Class 2 - Revised.pptx
@@ -5520,142 +5520,6 @@
   <p:clrMapOvr>
     <a:masterClrMapping/>
   </p:clrMapOvr>
-  <p:timing>
-    <p:tnLst>
-      <p:par>
-        <p:cTn id="1" dur="indefinite" restart="never" nodeType="tmRoot">
-          <p:childTnLst>
-            <p:seq concurrent="1" nextAc="seek">
-              <p:cTn id="2" dur="indefinite" nodeType="mainSeq">
-                <p:childTnLst>
-                  <p:par>
-                    <p:cTn id="3" fill="hold">
-                      <p:stCondLst>
-                        <p:cond delay="indefinite"/>
-                      </p:stCondLst>
-                      <p:childTnLst>
-                        <p:par>
-                          <p:cTn id="4" fill="hold">
-                            <p:stCondLst>
-                              <p:cond delay="0"/>
-                            </p:stCondLst>
-                            <p:childTnLst>
-                              <p:par>
-                                <p:cTn id="5" presetID="10" presetClass="entr" presetSubtype="0" fill="hold" grpId="0" nodeType="clickEffect">
-                                  <p:stCondLst>
-                                    <p:cond delay="0"/>
-                                  </p:stCondLst>
-                                  <p:childTnLst>
-                                    <p:set>
-                                      <p:cBhvr>
-                                        <p:cTn id="6" dur="1" fill="hold">
-                                          <p:stCondLst>
-                                            <p:cond delay="0"/>
-                                          </p:stCondLst>
-                                        </p:cTn>
-                                        <p:tgtEl>
-                                          <p:spTgt spid="256"/>
-                                        </p:tgtEl>
-                                        <p:attrNameLst>
-                                          <p:attrName>style.visibility</p:attrName>
-                                        </p:attrNameLst>
-                                      </p:cBhvr>
-                                      <p:to>
-                                        <p:strVal val="visible"/>
-                                      </p:to>
-                                    </p:set>
-                                    <p:animEffect transition="in" filter="fade">
-                                      <p:cBhvr>
-                                        <p:cTn id="7" dur="500"/>
-                                        <p:tgtEl>
-                                          <p:spTgt spid="256"/>
-                                        </p:tgtEl>
-                                      </p:cBhvr>
-                                    </p:animEffect>
-                                  </p:childTnLst>
-                                </p:cTn>
-                              </p:par>
-                            </p:childTnLst>
-                          </p:cTn>
-                        </p:par>
-                      </p:childTnLst>
-                    </p:cTn>
-                  </p:par>
-                  <p:par>
-                    <p:cTn id="8" fill="hold">
-                      <p:stCondLst>
-                        <p:cond delay="indefinite"/>
-                      </p:stCondLst>
-                      <p:childTnLst>
-                        <p:par>
-                          <p:cTn id="9" fill="hold">
-                            <p:stCondLst>
-                              <p:cond delay="0"/>
-                            </p:stCondLst>
-                            <p:childTnLst>
-                              <p:par>
-                                <p:cTn id="10" presetID="10" presetClass="entr" presetSubtype="0" fill="hold" grpId="0" nodeType="clickEffect">
-                                  <p:stCondLst>
-                                    <p:cond delay="0"/>
-                                  </p:stCondLst>
-                                  <p:childTnLst>
-                                    <p:set>
-                                      <p:cBhvr>
-                                        <p:cTn id="11" dur="1" fill="hold">
-                                          <p:stCondLst>
-                                            <p:cond delay="0"/>
-                                          </p:stCondLst>
-                                        </p:cTn>
-                                        <p:tgtEl>
-                                          <p:spTgt spid="257"/>
-                                        </p:tgtEl>
-                                        <p:attrNameLst>
-                                          <p:attrName>style.visibility</p:attrName>
-                                        </p:attrNameLst>
-                                      </p:cBhvr>
-                                      <p:to>
-                                        <p:strVal val="visible"/>
-                                      </p:to>
-                                    </p:set>
-                                    <p:animEffect transition="in" filter="fade">
-                                      <p:cBhvr>
-                                        <p:cTn id="12" dur="500"/>
-                                        <p:tgtEl>
-                                          <p:spTgt spid="257"/>
-                                        </p:tgtEl>
-                                      </p:cBhvr>
-                                    </p:animEffect>
-                                  </p:childTnLst>
-                                </p:cTn>
-                              </p:par>
-                            </p:childTnLst>
-                          </p:cTn>
-                        </p:par>
-                      </p:childTnLst>
-                    </p:cTn>
-                  </p:par>
-                </p:childTnLst>
-              </p:cTn>
-              <p:prevCondLst>
-                <p:cond evt="onPrev" delay="0">
-                  <p:tgtEl>
-                    <p:sldTgt/>
-                  </p:tgtEl>
-                </p:cond>
-              </p:prevCondLst>
-              <p:nextCondLst>
-                <p:cond evt="onNext" delay="0">
-                  <p:tgtEl>
-                    <p:sldTgt/>
-                  </p:tgtEl>
-                </p:cond>
-              </p:nextCondLst>
-            </p:seq>
-          </p:childTnLst>
-        </p:cTn>
-      </p:par>
-    </p:tnLst>
-  </p:timing>
 </p:sld>
 </file>
 
@@ -6334,142 +6198,6 @@
   <p:clrMapOvr>
     <a:masterClrMapping/>
   </p:clrMapOvr>
-  <p:timing>
-    <p:tnLst>
-      <p:par>
-        <p:cTn id="1" dur="indefinite" restart="never" nodeType="tmRoot">
-          <p:childTnLst>
-            <p:seq concurrent="1" nextAc="seek">
-              <p:cTn id="2" dur="indefinite" nodeType="mainSeq">
-                <p:childTnLst>
-                  <p:par>
-                    <p:cTn id="3" fill="hold">
-                      <p:stCondLst>
-                        <p:cond delay="indefinite"/>
-                      </p:stCondLst>
-                      <p:childTnLst>
-                        <p:par>
-                          <p:cTn id="4" fill="hold">
-                            <p:stCondLst>
-                              <p:cond delay="0"/>
-                            </p:stCondLst>
-                            <p:childTnLst>
-                              <p:par>
-                                <p:cTn id="5" presetID="10" presetClass="entr" presetSubtype="0" fill="hold" grpId="0" nodeType="clickEffect">
-                                  <p:stCondLst>
-                                    <p:cond delay="0"/>
-                                  </p:stCondLst>
-                                  <p:childTnLst>
-                                    <p:set>
-                                      <p:cBhvr>
-                                        <p:cTn id="6" dur="1" fill="hold">
-                                          <p:stCondLst>
-                                            <p:cond delay="0"/>
-                                          </p:stCondLst>
-                                        </p:cTn>
-                                        <p:tgtEl>
-                                          <p:spTgt spid="269"/>
-                                        </p:tgtEl>
-                                        <p:attrNameLst>
-                                          <p:attrName>style.visibility</p:attrName>
-                                        </p:attrNameLst>
-                                      </p:cBhvr>
-                                      <p:to>
-                                        <p:strVal val="visible"/>
-                                      </p:to>
-                                    </p:set>
-                                    <p:animEffect transition="in" filter="fade">
-                                      <p:cBhvr>
-                                        <p:cTn id="7" dur="500"/>
-                                        <p:tgtEl>
-                                          <p:spTgt spid="269"/>
-                                        </p:tgtEl>
-                                      </p:cBhvr>
-                                    </p:animEffect>
-                                  </p:childTnLst>
-                                </p:cTn>
-                              </p:par>
-                            </p:childTnLst>
-                          </p:cTn>
-                        </p:par>
-                      </p:childTnLst>
-                    </p:cTn>
-                  </p:par>
-                  <p:par>
-                    <p:cTn id="8" fill="hold">
-                      <p:stCondLst>
-                        <p:cond delay="indefinite"/>
-                      </p:stCondLst>
-                      <p:childTnLst>
-                        <p:par>
-                          <p:cTn id="9" fill="hold">
-                            <p:stCondLst>
-                              <p:cond delay="0"/>
-                            </p:stCondLst>
-                            <p:childTnLst>
-                              <p:par>
-                                <p:cTn id="10" presetID="10" presetClass="entr" presetSubtype="0" fill="hold" grpId="0" nodeType="clickEffect">
-                                  <p:stCondLst>
-                                    <p:cond delay="0"/>
-                                  </p:stCondLst>
-                                  <p:childTnLst>
-                                    <p:set>
-                                      <p:cBhvr>
-                                        <p:cTn id="11" dur="1" fill="hold">
-                                          <p:stCondLst>
-                                            <p:cond delay="0"/>
-                                          </p:stCondLst>
-                                        </p:cTn>
-                                        <p:tgtEl>
-                                          <p:spTgt spid="270"/>
-                                        </p:tgtEl>
-                                        <p:attrNameLst>
-                                          <p:attrName>style.visibility</p:attrName>
-                                        </p:attrNameLst>
-                                      </p:cBhvr>
-                                      <p:to>
-                                        <p:strVal val="visible"/>
-                                      </p:to>
-                                    </p:set>
-                                    <p:animEffect transition="in" filter="fade">
-                                      <p:cBhvr>
-                                        <p:cTn id="12" dur="500"/>
-                                        <p:tgtEl>
-                                          <p:spTgt spid="270"/>
-                                        </p:tgtEl>
-                                      </p:cBhvr>
-                                    </p:animEffect>
-                                  </p:childTnLst>
-                                </p:cTn>
-                              </p:par>
-                            </p:childTnLst>
-                          </p:cTn>
-                        </p:par>
-                      </p:childTnLst>
-                    </p:cTn>
-                  </p:par>
-                </p:childTnLst>
-              </p:cTn>
-              <p:prevCondLst>
-                <p:cond evt="onPrev" delay="0">
-                  <p:tgtEl>
-                    <p:sldTgt/>
-                  </p:tgtEl>
-                </p:cond>
-              </p:prevCondLst>
-              <p:nextCondLst>
-                <p:cond evt="onNext" delay="0">
-                  <p:tgtEl>
-                    <p:sldTgt/>
-                  </p:tgtEl>
-                </p:cond>
-              </p:nextCondLst>
-            </p:seq>
-          </p:childTnLst>
-        </p:cTn>
-      </p:par>
-    </p:tnLst>
-  </p:timing>
 </p:sld>
 </file>
 
@@ -7148,142 +6876,6 @@
   <p:clrMapOvr>
     <a:masterClrMapping/>
   </p:clrMapOvr>
-  <p:timing>
-    <p:tnLst>
-      <p:par>
-        <p:cTn id="1" dur="indefinite" restart="never" nodeType="tmRoot">
-          <p:childTnLst>
-            <p:seq concurrent="1" nextAc="seek">
-              <p:cTn id="2" dur="indefinite" nodeType="mainSeq">
-                <p:childTnLst>
-                  <p:par>
-                    <p:cTn id="3" fill="hold">
-                      <p:stCondLst>
-                        <p:cond delay="indefinite"/>
-                      </p:stCondLst>
-                      <p:childTnLst>
-                        <p:par>
-                          <p:cTn id="4" fill="hold">
-                            <p:stCondLst>
-                              <p:cond delay="0"/>
-                            </p:stCondLst>
-                            <p:childTnLst>
-                              <p:par>
-                                <p:cTn id="5" presetID="10" presetClass="entr" presetSubtype="0" fill="hold" grpId="0" nodeType="clickEffect">
-                                  <p:stCondLst>
-                                    <p:cond delay="0"/>
-                                  </p:stCondLst>
-                                  <p:childTnLst>
-                                    <p:set>
-                                      <p:cBhvr>
-                                        <p:cTn id="6" dur="1" fill="hold">
-                                          <p:stCondLst>
-                                            <p:cond delay="0"/>
-                                          </p:stCondLst>
-                                        </p:cTn>
-                                        <p:tgtEl>
-                                          <p:spTgt spid="282"/>
-                                        </p:tgtEl>
-                                        <p:attrNameLst>
-                                          <p:attrName>style.visibility</p:attrName>
-                                        </p:attrNameLst>
-                                      </p:cBhvr>
-                                      <p:to>
-                                        <p:strVal val="visible"/>
-                                      </p:to>
-                                    </p:set>
-                                    <p:animEffect transition="in" filter="fade">
-                                      <p:cBhvr>
-                                        <p:cTn id="7" dur="500"/>
-                                        <p:tgtEl>
-                                          <p:spTgt spid="282"/>
-                                        </p:tgtEl>
-                                      </p:cBhvr>
-                                    </p:animEffect>
-                                  </p:childTnLst>
-                                </p:cTn>
-                              </p:par>
-                            </p:childTnLst>
-                          </p:cTn>
-                        </p:par>
-                      </p:childTnLst>
-                    </p:cTn>
-                  </p:par>
-                  <p:par>
-                    <p:cTn id="8" fill="hold">
-                      <p:stCondLst>
-                        <p:cond delay="indefinite"/>
-                      </p:stCondLst>
-                      <p:childTnLst>
-                        <p:par>
-                          <p:cTn id="9" fill="hold">
-                            <p:stCondLst>
-                              <p:cond delay="0"/>
-                            </p:stCondLst>
-                            <p:childTnLst>
-                              <p:par>
-                                <p:cTn id="10" presetID="10" presetClass="entr" presetSubtype="0" fill="hold" grpId="0" nodeType="clickEffect">
-                                  <p:stCondLst>
-                                    <p:cond delay="0"/>
-                                  </p:stCondLst>
-                                  <p:childTnLst>
-                                    <p:set>
-                                      <p:cBhvr>
-                                        <p:cTn id="11" dur="1" fill="hold">
-                                          <p:stCondLst>
-                                            <p:cond delay="0"/>
-                                          </p:stCondLst>
-                                        </p:cTn>
-                                        <p:tgtEl>
-                                          <p:spTgt spid="283"/>
-                                        </p:tgtEl>
-                                        <p:attrNameLst>
-                                          <p:attrName>style.visibility</p:attrName>
-                                        </p:attrNameLst>
-                                      </p:cBhvr>
-                                      <p:to>
-                                        <p:strVal val="visible"/>
-                                      </p:to>
-                                    </p:set>
-                                    <p:animEffect transition="in" filter="fade">
-                                      <p:cBhvr>
-                                        <p:cTn id="12" dur="500"/>
-                                        <p:tgtEl>
-                                          <p:spTgt spid="283"/>
-                                        </p:tgtEl>
-                                      </p:cBhvr>
-                                    </p:animEffect>
-                                  </p:childTnLst>
-                                </p:cTn>
-                              </p:par>
-                            </p:childTnLst>
-                          </p:cTn>
-                        </p:par>
-                      </p:childTnLst>
-                    </p:cTn>
-                  </p:par>
-                </p:childTnLst>
-              </p:cTn>
-              <p:prevCondLst>
-                <p:cond evt="onPrev" delay="0">
-                  <p:tgtEl>
-                    <p:sldTgt/>
-                  </p:tgtEl>
-                </p:cond>
-              </p:prevCondLst>
-              <p:nextCondLst>
-                <p:cond evt="onNext" delay="0">
-                  <p:tgtEl>
-                    <p:sldTgt/>
-                  </p:tgtEl>
-                </p:cond>
-              </p:nextCondLst>
-            </p:seq>
-          </p:childTnLst>
-        </p:cTn>
-      </p:par>
-    </p:tnLst>
-  </p:timing>
 </p:sld>
 </file>
 
@@ -12573,265 +12165,6 @@
   <p:clrMapOvr>
     <a:masterClrMapping/>
   </p:clrMapOvr>
-  <p:timing>
-    <p:tnLst>
-      <p:par>
-        <p:cTn id="1" dur="indefinite" restart="never" nodeType="tmRoot">
-          <p:childTnLst>
-            <p:seq concurrent="1" nextAc="seek">
-              <p:cTn id="2" dur="indefinite" nodeType="mainSeq">
-                <p:childTnLst>
-                  <p:par>
-                    <p:cTn id="3" fill="hold">
-                      <p:stCondLst>
-                        <p:cond delay="indefinite"/>
-                      </p:stCondLst>
-                      <p:childTnLst>
-                        <p:par>
-                          <p:cTn id="4" fill="hold">
-                            <p:stCondLst>
-                              <p:cond delay="0"/>
-                            </p:stCondLst>
-                            <p:childTnLst>
-                              <p:par>
-                                <p:cTn id="5" presetID="10" presetClass="entr" presetSubtype="0" fill="hold" grpId="0" nodeType="clickEffect">
-                                  <p:stCondLst>
-                                    <p:cond delay="0"/>
-                                  </p:stCondLst>
-                                  <p:childTnLst>
-                                    <p:set>
-                                      <p:cBhvr>
-                                        <p:cTn id="6" dur="1" fill="hold">
-                                          <p:stCondLst>
-                                            <p:cond delay="0"/>
-                                          </p:stCondLst>
-                                        </p:cTn>
-                                        <p:tgtEl>
-                                          <p:spTgt spid="200"/>
-                                        </p:tgtEl>
-                                        <p:attrNameLst>
-                                          <p:attrName>style.visibility</p:attrName>
-                                        </p:attrNameLst>
-                                      </p:cBhvr>
-                                      <p:to>
-                                        <p:strVal val="visible"/>
-                                      </p:to>
-                                    </p:set>
-                                    <p:animEffect transition="in" filter="fade">
-                                      <p:cBhvr>
-                                        <p:cTn id="7" dur="500"/>
-                                        <p:tgtEl>
-                                          <p:spTgt spid="200"/>
-                                        </p:tgtEl>
-                                      </p:cBhvr>
-                                    </p:animEffect>
-                                  </p:childTnLst>
-                                </p:cTn>
-                              </p:par>
-                              <p:par>
-                                <p:cTn id="8" presetID="10" presetClass="entr" presetSubtype="0" fill="hold" grpId="0" nodeType="withEffect">
-                                  <p:stCondLst>
-                                    <p:cond delay="0"/>
-                                  </p:stCondLst>
-                                  <p:childTnLst>
-                                    <p:set>
-                                      <p:cBhvr>
-                                        <p:cTn id="9" dur="1" fill="hold">
-                                          <p:stCondLst>
-                                            <p:cond delay="0"/>
-                                          </p:stCondLst>
-                                        </p:cTn>
-                                        <p:tgtEl>
-                                          <p:spTgt spid="201"/>
-                                        </p:tgtEl>
-                                        <p:attrNameLst>
-                                          <p:attrName>style.visibility</p:attrName>
-                                        </p:attrNameLst>
-                                      </p:cBhvr>
-                                      <p:to>
-                                        <p:strVal val="visible"/>
-                                      </p:to>
-                                    </p:set>
-                                    <p:animEffect transition="in" filter="fade">
-                                      <p:cBhvr>
-                                        <p:cTn id="10" dur="500"/>
-                                        <p:tgtEl>
-                                          <p:spTgt spid="201"/>
-                                        </p:tgtEl>
-                                      </p:cBhvr>
-                                    </p:animEffect>
-                                  </p:childTnLst>
-                                </p:cTn>
-                              </p:par>
-                            </p:childTnLst>
-                          </p:cTn>
-                        </p:par>
-                      </p:childTnLst>
-                    </p:cTn>
-                  </p:par>
-                  <p:par>
-                    <p:cTn id="11" fill="hold">
-                      <p:stCondLst>
-                        <p:cond delay="indefinite"/>
-                      </p:stCondLst>
-                      <p:childTnLst>
-                        <p:par>
-                          <p:cTn id="12" fill="hold">
-                            <p:stCondLst>
-                              <p:cond delay="0"/>
-                            </p:stCondLst>
-                            <p:childTnLst>
-                              <p:par>
-                                <p:cTn id="13" presetID="10" presetClass="entr" presetSubtype="0" fill="hold" grpId="0" nodeType="clickEffect">
-                                  <p:stCondLst>
-                                    <p:cond delay="0"/>
-                                  </p:stCondLst>
-                                  <p:childTnLst>
-                                    <p:set>
-                                      <p:cBhvr>
-                                        <p:cTn id="14" dur="1" fill="hold">
-                                          <p:stCondLst>
-                                            <p:cond delay="0"/>
-                                          </p:stCondLst>
-                                        </p:cTn>
-                                        <p:tgtEl>
-                                          <p:spTgt spid="202"/>
-                                        </p:tgtEl>
-                                        <p:attrNameLst>
-                                          <p:attrName>style.visibility</p:attrName>
-                                        </p:attrNameLst>
-                                      </p:cBhvr>
-                                      <p:to>
-                                        <p:strVal val="visible"/>
-                                      </p:to>
-                                    </p:set>
-                                    <p:animEffect transition="in" filter="fade">
-                                      <p:cBhvr>
-                                        <p:cTn id="15" dur="500"/>
-                                        <p:tgtEl>
-                                          <p:spTgt spid="202"/>
-                                        </p:tgtEl>
-                                      </p:cBhvr>
-                                    </p:animEffect>
-                                  </p:childTnLst>
-                                </p:cTn>
-                              </p:par>
-                              <p:par>
-                                <p:cTn id="16" presetID="10" presetClass="entr" presetSubtype="0" fill="hold" grpId="0" nodeType="withEffect">
-                                  <p:stCondLst>
-                                    <p:cond delay="0"/>
-                                  </p:stCondLst>
-                                  <p:childTnLst>
-                                    <p:set>
-                                      <p:cBhvr>
-                                        <p:cTn id="17" dur="1" fill="hold">
-                                          <p:stCondLst>
-                                            <p:cond delay="0"/>
-                                          </p:stCondLst>
-                                        </p:cTn>
-                                        <p:tgtEl>
-                                          <p:spTgt spid="203"/>
-                                        </p:tgtEl>
-                                        <p:attrNameLst>
-                                          <p:attrName>style.visibility</p:attrName>
-                                        </p:attrNameLst>
-                                      </p:cBhvr>
-                                      <p:to>
-                                        <p:strVal val="visible"/>
-                                      </p:to>
-                                    </p:set>
-                                    <p:animEffect transition="in" filter="fade">
-                                      <p:cBhvr>
-                                        <p:cTn id="18" dur="500"/>
-                                        <p:tgtEl>
-                                          <p:spTgt spid="203"/>
-                                        </p:tgtEl>
-                                      </p:cBhvr>
-                                    </p:animEffect>
-                                  </p:childTnLst>
-                                </p:cTn>
-                              </p:par>
-                            </p:childTnLst>
-                          </p:cTn>
-                        </p:par>
-                      </p:childTnLst>
-                    </p:cTn>
-                  </p:par>
-                  <p:par>
-                    <p:cTn id="19" fill="hold">
-                      <p:stCondLst>
-                        <p:cond delay="indefinite"/>
-                      </p:stCondLst>
-                      <p:childTnLst>
-                        <p:par>
-                          <p:cTn id="20" fill="hold">
-                            <p:stCondLst>
-                              <p:cond delay="0"/>
-                            </p:stCondLst>
-                            <p:childTnLst>
-                              <p:par>
-                                <p:cTn id="21" presetID="10" presetClass="entr" presetSubtype="0" fill="hold" grpId="0" nodeType="clickEffect">
-                                  <p:stCondLst>
-                                    <p:cond delay="0"/>
-                                  </p:stCondLst>
-                                  <p:childTnLst>
-                                    <p:set>
-                                      <p:cBhvr>
-                                        <p:cTn id="22" dur="1" fill="hold">
-                                          <p:stCondLst>
-                                            <p:cond delay="0"/>
-                                          </p:stCondLst>
-                                        </p:cTn>
-                                        <p:tgtEl>
-                                          <p:spTgt spid="204"/>
-                                        </p:tgtEl>
-                                        <p:attrNameLst>
-                                          <p:attrName>style.visibility</p:attrName>
-                                        </p:attrNameLst>
-                                      </p:cBhvr>
-                                      <p:to>
-                                        <p:strVal val="visible"/>
-                                      </p:to>
-                                    </p:set>
-                                    <p:animEffect transition="in" filter="fade">
-                                      <p:cBhvr>
-                                        <p:cTn id="23" dur="500"/>
-                                        <p:tgtEl>
-                                          <p:spTgt spid="204"/>
-                                        </p:tgtEl>
-                                      </p:cBhvr>
-                                    </p:animEffect>
-                                  </p:childTnLst>
-                                </p:cTn>
-                              </p:par>
-                            </p:childTnLst>
-                          </p:cTn>
-                        </p:par>
-                      </p:childTnLst>
-                    </p:cTn>
-                  </p:par>
-                </p:childTnLst>
-              </p:cTn>
-              <p:prevCondLst>
-                <p:cond evt="onPrev" delay="0">
-                  <p:tgtEl>
-                    <p:sldTgt/>
-                  </p:tgtEl>
-                </p:cond>
-              </p:prevCondLst>
-              <p:nextCondLst>
-                <p:cond evt="onNext" delay="0">
-                  <p:tgtEl>
-                    <p:sldTgt/>
-                  </p:tgtEl>
-                </p:cond>
-              </p:nextCondLst>
-            </p:seq>
-          </p:childTnLst>
-        </p:cTn>
-      </p:par>
-    </p:tnLst>
-  </p:timing>
 </p:sld>
 </file>
 
@@ -13510,142 +12843,6 @@
   <p:clrMapOvr>
     <a:masterClrMapping/>
   </p:clrMapOvr>
-  <p:timing>
-    <p:tnLst>
-      <p:par>
-        <p:cTn id="1" dur="indefinite" restart="never" nodeType="tmRoot">
-          <p:childTnLst>
-            <p:seq concurrent="1" nextAc="seek">
-              <p:cTn id="2" dur="indefinite" nodeType="mainSeq">
-                <p:childTnLst>
-                  <p:par>
-                    <p:cTn id="3" fill="hold">
-                      <p:stCondLst>
-                        <p:cond delay="indefinite"/>
-                      </p:stCondLst>
-                      <p:childTnLst>
-                        <p:par>
-                          <p:cTn id="4" fill="hold">
-                            <p:stCondLst>
-                              <p:cond delay="0"/>
-                            </p:stCondLst>
-                            <p:childTnLst>
-                              <p:par>
-                                <p:cTn id="5" presetID="10" presetClass="entr" presetSubtype="0" fill="hold" grpId="0" nodeType="clickEffect">
-                                  <p:stCondLst>
-                                    <p:cond delay="0"/>
-                                  </p:stCondLst>
-                                  <p:childTnLst>
-                                    <p:set>
-                                      <p:cBhvr>
-                                        <p:cTn id="6" dur="1" fill="hold">
-                                          <p:stCondLst>
-                                            <p:cond delay="0"/>
-                                          </p:stCondLst>
-                                        </p:cTn>
-                                        <p:tgtEl>
-                                          <p:spTgt spid="216"/>
-                                        </p:tgtEl>
-                                        <p:attrNameLst>
-                                          <p:attrName>style.visibility</p:attrName>
-                                        </p:attrNameLst>
-                                      </p:cBhvr>
-                                      <p:to>
-                                        <p:strVal val="visible"/>
-                                      </p:to>
-                                    </p:set>
-                                    <p:animEffect transition="in" filter="fade">
-                                      <p:cBhvr>
-                                        <p:cTn id="7" dur="500"/>
-                                        <p:tgtEl>
-                                          <p:spTgt spid="216"/>
-                                        </p:tgtEl>
-                                      </p:cBhvr>
-                                    </p:animEffect>
-                                  </p:childTnLst>
-                                </p:cTn>
-                              </p:par>
-                            </p:childTnLst>
-                          </p:cTn>
-                        </p:par>
-                      </p:childTnLst>
-                    </p:cTn>
-                  </p:par>
-                  <p:par>
-                    <p:cTn id="8" fill="hold">
-                      <p:stCondLst>
-                        <p:cond delay="indefinite"/>
-                      </p:stCondLst>
-                      <p:childTnLst>
-                        <p:par>
-                          <p:cTn id="9" fill="hold">
-                            <p:stCondLst>
-                              <p:cond delay="0"/>
-                            </p:stCondLst>
-                            <p:childTnLst>
-                              <p:par>
-                                <p:cTn id="10" presetID="10" presetClass="entr" presetSubtype="0" fill="hold" grpId="0" nodeType="clickEffect">
-                                  <p:stCondLst>
-                                    <p:cond delay="0"/>
-                                  </p:stCondLst>
-                                  <p:childTnLst>
-                                    <p:set>
-                                      <p:cBhvr>
-                                        <p:cTn id="11" dur="1" fill="hold">
-                                          <p:stCondLst>
-                                            <p:cond delay="0"/>
-                                          </p:stCondLst>
-                                        </p:cTn>
-                                        <p:tgtEl>
-                                          <p:spTgt spid="217"/>
-                                        </p:tgtEl>
-                                        <p:attrNameLst>
-                                          <p:attrName>style.visibility</p:attrName>
-                                        </p:attrNameLst>
-                                      </p:cBhvr>
-                                      <p:to>
-                                        <p:strVal val="visible"/>
-                                      </p:to>
-                                    </p:set>
-                                    <p:animEffect transition="in" filter="fade">
-                                      <p:cBhvr>
-                                        <p:cTn id="12" dur="500"/>
-                                        <p:tgtEl>
-                                          <p:spTgt spid="217"/>
-                                        </p:tgtEl>
-                                      </p:cBhvr>
-                                    </p:animEffect>
-                                  </p:childTnLst>
-                                </p:cTn>
-                              </p:par>
-                            </p:childTnLst>
-                          </p:cTn>
-                        </p:par>
-                      </p:childTnLst>
-                    </p:cTn>
-                  </p:par>
-                </p:childTnLst>
-              </p:cTn>
-              <p:prevCondLst>
-                <p:cond evt="onPrev" delay="0">
-                  <p:tgtEl>
-                    <p:sldTgt/>
-                  </p:tgtEl>
-                </p:cond>
-              </p:prevCondLst>
-              <p:nextCondLst>
-                <p:cond evt="onNext" delay="0">
-                  <p:tgtEl>
-                    <p:sldTgt/>
-                  </p:tgtEl>
-                </p:cond>
-              </p:nextCondLst>
-            </p:seq>
-          </p:childTnLst>
-        </p:cTn>
-      </p:par>
-    </p:tnLst>
-  </p:timing>
 </p:sld>
 </file>
 
@@ -14282,265 +13479,6 @@
   <p:clrMapOvr>
     <a:masterClrMapping/>
   </p:clrMapOvr>
-  <p:timing>
-    <p:tnLst>
-      <p:par>
-        <p:cTn id="1" dur="indefinite" restart="never" nodeType="tmRoot">
-          <p:childTnLst>
-            <p:seq concurrent="1" nextAc="seek">
-              <p:cTn id="2" dur="indefinite" nodeType="mainSeq">
-                <p:childTnLst>
-                  <p:par>
-                    <p:cTn id="3" fill="hold">
-                      <p:stCondLst>
-                        <p:cond delay="indefinite"/>
-                      </p:stCondLst>
-                      <p:childTnLst>
-                        <p:par>
-                          <p:cTn id="4" fill="hold">
-                            <p:stCondLst>
-                              <p:cond delay="0"/>
-                            </p:stCondLst>
-                            <p:childTnLst>
-                              <p:par>
-                                <p:cTn id="5" presetID="10" presetClass="entr" presetSubtype="0" fill="hold" grpId="0" nodeType="clickEffect">
-                                  <p:stCondLst>
-                                    <p:cond delay="0"/>
-                                  </p:stCondLst>
-                                  <p:childTnLst>
-                                    <p:set>
-                                      <p:cBhvr>
-                                        <p:cTn id="6" dur="1" fill="hold">
-                                          <p:stCondLst>
-                                            <p:cond delay="0"/>
-                                          </p:stCondLst>
-                                        </p:cTn>
-                                        <p:tgtEl>
-                                          <p:spTgt spid="227"/>
-                                        </p:tgtEl>
-                                        <p:attrNameLst>
-                                          <p:attrName>style.visibility</p:attrName>
-                                        </p:attrNameLst>
-                                      </p:cBhvr>
-                                      <p:to>
-                                        <p:strVal val="visible"/>
-                                      </p:to>
-                                    </p:set>
-                                    <p:animEffect transition="in" filter="fade">
-                                      <p:cBhvr>
-                                        <p:cTn id="7" dur="500"/>
-                                        <p:tgtEl>
-                                          <p:spTgt spid="227"/>
-                                        </p:tgtEl>
-                                      </p:cBhvr>
-                                    </p:animEffect>
-                                  </p:childTnLst>
-                                </p:cTn>
-                              </p:par>
-                              <p:par>
-                                <p:cTn id="8" presetID="10" presetClass="entr" presetSubtype="0" fill="hold" grpId="0" nodeType="withEffect">
-                                  <p:stCondLst>
-                                    <p:cond delay="0"/>
-                                  </p:stCondLst>
-                                  <p:childTnLst>
-                                    <p:set>
-                                      <p:cBhvr>
-                                        <p:cTn id="9" dur="1" fill="hold">
-                                          <p:stCondLst>
-                                            <p:cond delay="0"/>
-                                          </p:stCondLst>
-                                        </p:cTn>
-                                        <p:tgtEl>
-                                          <p:spTgt spid="228"/>
-                                        </p:tgtEl>
-                                        <p:attrNameLst>
-                                          <p:attrName>style.visibility</p:attrName>
-                                        </p:attrNameLst>
-                                      </p:cBhvr>
-                                      <p:to>
-                                        <p:strVal val="visible"/>
-                                      </p:to>
-                                    </p:set>
-                                    <p:animEffect transition="in" filter="fade">
-                                      <p:cBhvr>
-                                        <p:cTn id="10" dur="500"/>
-                                        <p:tgtEl>
-                                          <p:spTgt spid="228"/>
-                                        </p:tgtEl>
-                                      </p:cBhvr>
-                                    </p:animEffect>
-                                  </p:childTnLst>
-                                </p:cTn>
-                              </p:par>
-                            </p:childTnLst>
-                          </p:cTn>
-                        </p:par>
-                      </p:childTnLst>
-                    </p:cTn>
-                  </p:par>
-                  <p:par>
-                    <p:cTn id="11" fill="hold">
-                      <p:stCondLst>
-                        <p:cond delay="indefinite"/>
-                      </p:stCondLst>
-                      <p:childTnLst>
-                        <p:par>
-                          <p:cTn id="12" fill="hold">
-                            <p:stCondLst>
-                              <p:cond delay="0"/>
-                            </p:stCondLst>
-                            <p:childTnLst>
-                              <p:par>
-                                <p:cTn id="13" presetID="10" presetClass="entr" presetSubtype="0" fill="hold" grpId="0" nodeType="clickEffect">
-                                  <p:stCondLst>
-                                    <p:cond delay="0"/>
-                                  </p:stCondLst>
-                                  <p:childTnLst>
-                                    <p:set>
-                                      <p:cBhvr>
-                                        <p:cTn id="14" dur="1" fill="hold">
-                                          <p:stCondLst>
-                                            <p:cond delay="0"/>
-                                          </p:stCondLst>
-                                        </p:cTn>
-                                        <p:tgtEl>
-                                          <p:spTgt spid="229"/>
-                                        </p:tgtEl>
-                                        <p:attrNameLst>
-                                          <p:attrName>style.visibility</p:attrName>
-                                        </p:attrNameLst>
-                                      </p:cBhvr>
-                                      <p:to>
-                                        <p:strVal val="visible"/>
-                                      </p:to>
-                                    </p:set>
-                                    <p:animEffect transition="in" filter="fade">
-                                      <p:cBhvr>
-                                        <p:cTn id="15" dur="500"/>
-                                        <p:tgtEl>
-                                          <p:spTgt spid="229"/>
-                                        </p:tgtEl>
-                                      </p:cBhvr>
-                                    </p:animEffect>
-                                  </p:childTnLst>
-                                </p:cTn>
-                              </p:par>
-                              <p:par>
-                                <p:cTn id="16" presetID="10" presetClass="entr" presetSubtype="0" fill="hold" grpId="0" nodeType="withEffect">
-                                  <p:stCondLst>
-                                    <p:cond delay="0"/>
-                                  </p:stCondLst>
-                                  <p:childTnLst>
-                                    <p:set>
-                                      <p:cBhvr>
-                                        <p:cTn id="17" dur="1" fill="hold">
-                                          <p:stCondLst>
-                                            <p:cond delay="0"/>
-                                          </p:stCondLst>
-                                        </p:cTn>
-                                        <p:tgtEl>
-                                          <p:spTgt spid="230"/>
-                                        </p:tgtEl>
-                                        <p:attrNameLst>
-                                          <p:attrName>style.visibility</p:attrName>
-                                        </p:attrNameLst>
-                                      </p:cBhvr>
-                                      <p:to>
-                                        <p:strVal val="visible"/>
-                                      </p:to>
-                                    </p:set>
-                                    <p:animEffect transition="in" filter="fade">
-                                      <p:cBhvr>
-                                        <p:cTn id="18" dur="500"/>
-                                        <p:tgtEl>
-                                          <p:spTgt spid="230"/>
-                                        </p:tgtEl>
-                                      </p:cBhvr>
-                                    </p:animEffect>
-                                  </p:childTnLst>
-                                </p:cTn>
-                              </p:par>
-                            </p:childTnLst>
-                          </p:cTn>
-                        </p:par>
-                      </p:childTnLst>
-                    </p:cTn>
-                  </p:par>
-                  <p:par>
-                    <p:cTn id="19" fill="hold">
-                      <p:stCondLst>
-                        <p:cond delay="indefinite"/>
-                      </p:stCondLst>
-                      <p:childTnLst>
-                        <p:par>
-                          <p:cTn id="20" fill="hold">
-                            <p:stCondLst>
-                              <p:cond delay="0"/>
-                            </p:stCondLst>
-                            <p:childTnLst>
-                              <p:par>
-                                <p:cTn id="21" presetID="10" presetClass="entr" presetSubtype="0" fill="hold" grpId="0" nodeType="clickEffect">
-                                  <p:stCondLst>
-                                    <p:cond delay="0"/>
-                                  </p:stCondLst>
-                                  <p:childTnLst>
-                                    <p:set>
-                                      <p:cBhvr>
-                                        <p:cTn id="22" dur="1" fill="hold">
-                                          <p:stCondLst>
-                                            <p:cond delay="0"/>
-                                          </p:stCondLst>
-                                        </p:cTn>
-                                        <p:tgtEl>
-                                          <p:spTgt spid="231"/>
-                                        </p:tgtEl>
-                                        <p:attrNameLst>
-                                          <p:attrName>style.visibility</p:attrName>
-                                        </p:attrNameLst>
-                                      </p:cBhvr>
-                                      <p:to>
-                                        <p:strVal val="visible"/>
-                                      </p:to>
-                                    </p:set>
-                                    <p:animEffect transition="in" filter="fade">
-                                      <p:cBhvr>
-                                        <p:cTn id="23" dur="500"/>
-                                        <p:tgtEl>
-                                          <p:spTgt spid="231"/>
-                                        </p:tgtEl>
-                                      </p:cBhvr>
-                                    </p:animEffect>
-                                  </p:childTnLst>
-                                </p:cTn>
-                              </p:par>
-                            </p:childTnLst>
-                          </p:cTn>
-                        </p:par>
-                      </p:childTnLst>
-                    </p:cTn>
-                  </p:par>
-                </p:childTnLst>
-              </p:cTn>
-              <p:prevCondLst>
-                <p:cond evt="onPrev" delay="0">
-                  <p:tgtEl>
-                    <p:sldTgt/>
-                  </p:tgtEl>
-                </p:cond>
-              </p:prevCondLst>
-              <p:nextCondLst>
-                <p:cond evt="onNext" delay="0">
-                  <p:tgtEl>
-                    <p:sldTgt/>
-                  </p:tgtEl>
-                </p:cond>
-              </p:nextCondLst>
-            </p:seq>
-          </p:childTnLst>
-        </p:cTn>
-      </p:par>
-    </p:tnLst>
-  </p:timing>
 </p:sld>
 </file>
 
@@ -15219,142 +14157,6 @@
   <p:clrMapOvr>
     <a:masterClrMapping/>
   </p:clrMapOvr>
-  <p:timing>
-    <p:tnLst>
-      <p:par>
-        <p:cTn id="1" dur="indefinite" restart="never" nodeType="tmRoot">
-          <p:childTnLst>
-            <p:seq concurrent="1" nextAc="seek">
-              <p:cTn id="2" dur="indefinite" nodeType="mainSeq">
-                <p:childTnLst>
-                  <p:par>
-                    <p:cTn id="3" fill="hold">
-                      <p:stCondLst>
-                        <p:cond delay="indefinite"/>
-                      </p:stCondLst>
-                      <p:childTnLst>
-                        <p:par>
-                          <p:cTn id="4" fill="hold">
-                            <p:stCondLst>
-                              <p:cond delay="0"/>
-                            </p:stCondLst>
-                            <p:childTnLst>
-                              <p:par>
-                                <p:cTn id="5" presetID="10" presetClass="entr" presetSubtype="0" fill="hold" grpId="0" nodeType="clickEffect">
-                                  <p:stCondLst>
-                                    <p:cond delay="0"/>
-                                  </p:stCondLst>
-                                  <p:childTnLst>
-                                    <p:set>
-                                      <p:cBhvr>
-                                        <p:cTn id="6" dur="1" fill="hold">
-                                          <p:stCondLst>
-                                            <p:cond delay="0"/>
-                                          </p:stCondLst>
-                                        </p:cTn>
-                                        <p:tgtEl>
-                                          <p:spTgt spid="243"/>
-                                        </p:tgtEl>
-                                        <p:attrNameLst>
-                                          <p:attrName>style.visibility</p:attrName>
-                                        </p:attrNameLst>
-                                      </p:cBhvr>
-                                      <p:to>
-                                        <p:strVal val="visible"/>
-                                      </p:to>
-                                    </p:set>
-                                    <p:animEffect transition="in" filter="fade">
-                                      <p:cBhvr>
-                                        <p:cTn id="7" dur="500"/>
-                                        <p:tgtEl>
-                                          <p:spTgt spid="243"/>
-                                        </p:tgtEl>
-                                      </p:cBhvr>
-                                    </p:animEffect>
-                                  </p:childTnLst>
-                                </p:cTn>
-                              </p:par>
-                            </p:childTnLst>
-                          </p:cTn>
-                        </p:par>
-                      </p:childTnLst>
-                    </p:cTn>
-                  </p:par>
-                  <p:par>
-                    <p:cTn id="8" fill="hold">
-                      <p:stCondLst>
-                        <p:cond delay="indefinite"/>
-                      </p:stCondLst>
-                      <p:childTnLst>
-                        <p:par>
-                          <p:cTn id="9" fill="hold">
-                            <p:stCondLst>
-                              <p:cond delay="0"/>
-                            </p:stCondLst>
-                            <p:childTnLst>
-                              <p:par>
-                                <p:cTn id="10" presetID="10" presetClass="entr" presetSubtype="0" fill="hold" grpId="0" nodeType="clickEffect">
-                                  <p:stCondLst>
-                                    <p:cond delay="0"/>
-                                  </p:stCondLst>
-                                  <p:childTnLst>
-                                    <p:set>
-                                      <p:cBhvr>
-                                        <p:cTn id="11" dur="1" fill="hold">
-                                          <p:stCondLst>
-                                            <p:cond delay="0"/>
-                                          </p:stCondLst>
-                                        </p:cTn>
-                                        <p:tgtEl>
-                                          <p:spTgt spid="244"/>
-                                        </p:tgtEl>
-                                        <p:attrNameLst>
-                                          <p:attrName>style.visibility</p:attrName>
-                                        </p:attrNameLst>
-                                      </p:cBhvr>
-                                      <p:to>
-                                        <p:strVal val="visible"/>
-                                      </p:to>
-                                    </p:set>
-                                    <p:animEffect transition="in" filter="fade">
-                                      <p:cBhvr>
-                                        <p:cTn id="12" dur="500"/>
-                                        <p:tgtEl>
-                                          <p:spTgt spid="244"/>
-                                        </p:tgtEl>
-                                      </p:cBhvr>
-                                    </p:animEffect>
-                                  </p:childTnLst>
-                                </p:cTn>
-                              </p:par>
-                            </p:childTnLst>
-                          </p:cTn>
-                        </p:par>
-                      </p:childTnLst>
-                    </p:cTn>
-                  </p:par>
-                </p:childTnLst>
-              </p:cTn>
-              <p:prevCondLst>
-                <p:cond evt="onPrev" delay="0">
-                  <p:tgtEl>
-                    <p:sldTgt/>
-                  </p:tgtEl>
-                </p:cond>
-              </p:prevCondLst>
-              <p:nextCondLst>
-                <p:cond evt="onNext" delay="0">
-                  <p:tgtEl>
-                    <p:sldTgt/>
-                  </p:tgtEl>
-                </p:cond>
-              </p:nextCondLst>
-            </p:seq>
-          </p:childTnLst>
-        </p:cTn>
-      </p:par>
-    </p:tnLst>
-  </p:timing>
 </p:sld>
 </file>
 
